--- a/projects/customer-churn-modeling/customer-churn-modeling.pptx
+++ b/projects/customer-churn-modeling/customer-churn-modeling.pptx
@@ -3462,6 +3462,7 @@
       <p:sp>
         <p:nvSpPr>
           <p:cNvPr id="6" name="camelliapramanik.github.io">
+            <ns0:hlinkClick xmlns:ns0="http://schemas.openxmlformats.org/drawingml/2006/main" xmlns:ns1="http://schemas.openxmlformats.org/officeDocument/2006/relationships" ns1:id="Rcaaf3ebb832346a4" tooltip="Open https://camelliapramanik.github.io/"/>
             <a:extLst xmlns:a="http://schemas.openxmlformats.org/drawingml/2006/main">
               <a:ext uri="{FF2B5EF4-FFF2-40B4-BE49-F238E27FC236}">
                 <a16:creationId xmlns:a16="http://schemas.microsoft.com/office/drawing/2014/main" id="{1B217C74-71DF-4FD1-9472-D55C10AB7C94}"/>
@@ -7599,6 +7600,7 @@
       <p:sp>
         <p:nvSpPr>
           <p:cNvPr id="8" name="Explore my portfolio">
+            <ns0:hlinkClick xmlns:ns0="http://schemas.openxmlformats.org/drawingml/2006/main" xmlns:ns1="http://schemas.openxmlformats.org/officeDocument/2006/relationships" ns1:id="R1213917f20db44ad" tooltip="Open https://camelliapramanik.github.io/"/>
             <a:extLst xmlns:a="http://schemas.openxmlformats.org/drawingml/2006/main">
               <a:ext uri="{FF2B5EF4-FFF2-40B4-BE49-F238E27FC236}">
                 <a16:creationId xmlns:a16="http://schemas.microsoft.com/office/drawing/2014/main" id="{B68485C2-6BA3-4B99-A94E-0F920D383A97}"/>
